--- a/draft_icon/draft_icon.pptx
+++ b/draft_icon/draft_icon.pptx
@@ -10,6 +10,7 @@
     <p:sldId id="258" r:id="rId4"/>
     <p:sldId id="259" r:id="rId5"/>
     <p:sldId id="260" r:id="rId6"/>
+    <p:sldId id="261" r:id="rId7"/>
   </p:sldIdLst>
   <p:sldSz cx="12192000" cy="6858000"/>
   <p:notesSz cx="6858000" cy="9144000"/>
@@ -108,6 +109,11 @@
       </a:defRPr>
     </a:lvl9pPr>
   </p:defaultTextStyle>
+  <p:extLst>
+    <p:ext uri="{EFAFB233-063F-42B5-8137-9DF3F51BA10A}">
+      <p15:sldGuideLst xmlns:p15="http://schemas.microsoft.com/office/powerpoint/2012/main"/>
+    </p:ext>
+  </p:extLst>
 </p:presentation>
 </file>
 
@@ -260,7 +266,7 @@
           <a:p>
             <a:fld id="{595817C8-2D2C-46C8-966F-08F34128938C}" type="datetimeFigureOut">
               <a:rPr kumimoji="1" lang="ja-JP" altLang="en-US" smtClean="0"/>
-              <a:t>2026/6/25</a:t>
+              <a:t>2026/6/26</a:t>
             </a:fld>
             <a:endParaRPr kumimoji="1" lang="ja-JP" altLang="en-US"/>
           </a:p>
@@ -460,7 +466,7 @@
           <a:p>
             <a:fld id="{595817C8-2D2C-46C8-966F-08F34128938C}" type="datetimeFigureOut">
               <a:rPr kumimoji="1" lang="ja-JP" altLang="en-US" smtClean="0"/>
-              <a:t>2026/6/25</a:t>
+              <a:t>2026/6/26</a:t>
             </a:fld>
             <a:endParaRPr kumimoji="1" lang="ja-JP" altLang="en-US"/>
           </a:p>
@@ -670,7 +676,7 @@
           <a:p>
             <a:fld id="{595817C8-2D2C-46C8-966F-08F34128938C}" type="datetimeFigureOut">
               <a:rPr kumimoji="1" lang="ja-JP" altLang="en-US" smtClean="0"/>
-              <a:t>2026/6/25</a:t>
+              <a:t>2026/6/26</a:t>
             </a:fld>
             <a:endParaRPr kumimoji="1" lang="ja-JP" altLang="en-US"/>
           </a:p>
@@ -870,7 +876,7 @@
           <a:p>
             <a:fld id="{595817C8-2D2C-46C8-966F-08F34128938C}" type="datetimeFigureOut">
               <a:rPr kumimoji="1" lang="ja-JP" altLang="en-US" smtClean="0"/>
-              <a:t>2026/6/25</a:t>
+              <a:t>2026/6/26</a:t>
             </a:fld>
             <a:endParaRPr kumimoji="1" lang="ja-JP" altLang="en-US"/>
           </a:p>
@@ -1146,7 +1152,7 @@
           <a:p>
             <a:fld id="{595817C8-2D2C-46C8-966F-08F34128938C}" type="datetimeFigureOut">
               <a:rPr kumimoji="1" lang="ja-JP" altLang="en-US" smtClean="0"/>
-              <a:t>2026/6/25</a:t>
+              <a:t>2026/6/26</a:t>
             </a:fld>
             <a:endParaRPr kumimoji="1" lang="ja-JP" altLang="en-US"/>
           </a:p>
@@ -1414,7 +1420,7 @@
           <a:p>
             <a:fld id="{595817C8-2D2C-46C8-966F-08F34128938C}" type="datetimeFigureOut">
               <a:rPr kumimoji="1" lang="ja-JP" altLang="en-US" smtClean="0"/>
-              <a:t>2026/6/25</a:t>
+              <a:t>2026/6/26</a:t>
             </a:fld>
             <a:endParaRPr kumimoji="1" lang="ja-JP" altLang="en-US"/>
           </a:p>
@@ -1829,7 +1835,7 @@
           <a:p>
             <a:fld id="{595817C8-2D2C-46C8-966F-08F34128938C}" type="datetimeFigureOut">
               <a:rPr kumimoji="1" lang="ja-JP" altLang="en-US" smtClean="0"/>
-              <a:t>2026/6/25</a:t>
+              <a:t>2026/6/26</a:t>
             </a:fld>
             <a:endParaRPr kumimoji="1" lang="ja-JP" altLang="en-US"/>
           </a:p>
@@ -1971,7 +1977,7 @@
           <a:p>
             <a:fld id="{595817C8-2D2C-46C8-966F-08F34128938C}" type="datetimeFigureOut">
               <a:rPr kumimoji="1" lang="ja-JP" altLang="en-US" smtClean="0"/>
-              <a:t>2026/6/25</a:t>
+              <a:t>2026/6/26</a:t>
             </a:fld>
             <a:endParaRPr kumimoji="1" lang="ja-JP" altLang="en-US"/>
           </a:p>
@@ -2084,7 +2090,7 @@
           <a:p>
             <a:fld id="{595817C8-2D2C-46C8-966F-08F34128938C}" type="datetimeFigureOut">
               <a:rPr kumimoji="1" lang="ja-JP" altLang="en-US" smtClean="0"/>
-              <a:t>2026/6/25</a:t>
+              <a:t>2026/6/26</a:t>
             </a:fld>
             <a:endParaRPr kumimoji="1" lang="ja-JP" altLang="en-US"/>
           </a:p>
@@ -2397,7 +2403,7 @@
           <a:p>
             <a:fld id="{595817C8-2D2C-46C8-966F-08F34128938C}" type="datetimeFigureOut">
               <a:rPr kumimoji="1" lang="ja-JP" altLang="en-US" smtClean="0"/>
-              <a:t>2026/6/25</a:t>
+              <a:t>2026/6/26</a:t>
             </a:fld>
             <a:endParaRPr kumimoji="1" lang="ja-JP" altLang="en-US"/>
           </a:p>
@@ -2686,7 +2692,7 @@
           <a:p>
             <a:fld id="{595817C8-2D2C-46C8-966F-08F34128938C}" type="datetimeFigureOut">
               <a:rPr kumimoji="1" lang="ja-JP" altLang="en-US" smtClean="0"/>
-              <a:t>2026/6/25</a:t>
+              <a:t>2026/6/26</a:t>
             </a:fld>
             <a:endParaRPr kumimoji="1" lang="ja-JP" altLang="en-US"/>
           </a:p>
@@ -2929,7 +2935,7 @@
           <a:p>
             <a:fld id="{595817C8-2D2C-46C8-966F-08F34128938C}" type="datetimeFigureOut">
               <a:rPr kumimoji="1" lang="ja-JP" altLang="en-US" smtClean="0"/>
-              <a:t>2026/6/25</a:t>
+              <a:t>2026/6/26</a:t>
             </a:fld>
             <a:endParaRPr kumimoji="1" lang="ja-JP" altLang="en-US"/>
           </a:p>
@@ -3985,116 +3991,300 @@
           <a:chExt cx="0" cy="0"/>
         </a:xfrm>
       </p:grpSpPr>
-      <p:sp>
-        <p:nvSpPr>
-          <p:cNvPr id="4" name="Rectangle 3">
-            <a:extLst>
-              <a:ext uri="{FF2B5EF4-FFF2-40B4-BE49-F238E27FC236}">
-                <a16:creationId xmlns:a16="http://schemas.microsoft.com/office/drawing/2014/main" id="{B55289DC-E9B2-BE5D-1DEE-74DECE9BCB08}"/>
-              </a:ext>
-            </a:extLst>
-          </p:cNvPr>
-          <p:cNvSpPr/>
+      <p:grpSp>
+        <p:nvGrpSpPr>
+          <p:cNvPr id="3" name="Group 2">
+            <a:extLst>
+              <a:ext uri="{FF2B5EF4-FFF2-40B4-BE49-F238E27FC236}">
+                <a16:creationId xmlns:a16="http://schemas.microsoft.com/office/drawing/2014/main" id="{30D8020D-09B3-8A08-61C7-6840DCE476FE}"/>
+              </a:ext>
+            </a:extLst>
+          </p:cNvPr>
+          <p:cNvGrpSpPr/>
           <p:nvPr/>
-        </p:nvSpPr>
-        <p:spPr>
+        </p:nvGrpSpPr>
+        <p:grpSpPr>
           <a:xfrm>
             <a:off x="3396000" y="729000"/>
             <a:ext cx="5400000" cy="5400000"/>
+            <a:chOff x="3396000" y="729000"/>
+            <a:chExt cx="5400000" cy="5400000"/>
           </a:xfrm>
-          <a:prstGeom prst="rect">
-            <a:avLst/>
-          </a:prstGeom>
-          <a:solidFill>
-            <a:schemeClr val="bg1"/>
-          </a:solidFill>
-          <a:ln w="101600"/>
-        </p:spPr>
-        <p:style>
-          <a:lnRef idx="2">
-            <a:schemeClr val="accent1">
-              <a:shade val="15000"/>
-            </a:schemeClr>
-          </a:lnRef>
-          <a:fillRef idx="1">
-            <a:schemeClr val="accent1"/>
-          </a:fillRef>
-          <a:effectRef idx="0">
-            <a:schemeClr val="accent1"/>
-          </a:effectRef>
-          <a:fontRef idx="minor">
-            <a:schemeClr val="lt1"/>
-          </a:fontRef>
-        </p:style>
-        <p:txBody>
-          <a:bodyPr rtlCol="0" anchor="ctr"/>
-          <a:lstStyle/>
-          <a:p>
-            <a:pPr algn="ctr"/>
-            <a:endParaRPr lang="ja-JP" altLang="en-US" sz="12000" b="1" dirty="0">
-              <a:solidFill>
-                <a:schemeClr val="tx1"/>
-              </a:solidFill>
-              <a:latin typeface="EPSON Pゴシック W7" panose="02000600000000000000" pitchFamily="2" charset="-128"/>
-              <a:ea typeface="EPSON Pゴシック W7" panose="02000600000000000000" pitchFamily="2" charset="-128"/>
-            </a:endParaRPr>
-          </a:p>
-        </p:txBody>
-      </p:sp>
-      <p:sp>
-        <p:nvSpPr>
-          <p:cNvPr id="2" name="TextBox 1">
-            <a:extLst>
-              <a:ext uri="{FF2B5EF4-FFF2-40B4-BE49-F238E27FC236}">
-                <a16:creationId xmlns:a16="http://schemas.microsoft.com/office/drawing/2014/main" id="{CFEAD816-A709-7F67-4D02-76FCC7515A24}"/>
-              </a:ext>
-            </a:extLst>
-          </p:cNvPr>
-          <p:cNvSpPr txBox="1"/>
-          <p:nvPr/>
-        </p:nvSpPr>
-        <p:spPr>
-          <a:xfrm>
-            <a:off x="4005942" y="829181"/>
-            <a:ext cx="4180115" cy="5016758"/>
-          </a:xfrm>
-          <a:prstGeom prst="rect">
-            <a:avLst/>
-          </a:prstGeom>
-          <a:noFill/>
-        </p:spPr>
-        <p:txBody>
-          <a:bodyPr wrap="square" rtlCol="0">
-            <a:spAutoFit/>
-          </a:bodyPr>
-          <a:lstStyle/>
-          <a:p>
-            <a:r>
-              <a:rPr lang="en-US" altLang="ja-JP" sz="16000" b="1" dirty="0">
+        </p:grpSpPr>
+        <p:sp>
+          <p:nvSpPr>
+            <p:cNvPr id="4" name="Rectangle 3">
+              <a:extLst>
+                <a:ext uri="{FF2B5EF4-FFF2-40B4-BE49-F238E27FC236}">
+                  <a16:creationId xmlns:a16="http://schemas.microsoft.com/office/drawing/2014/main" id="{B55289DC-E9B2-BE5D-1DEE-74DECE9BCB08}"/>
+                </a:ext>
+              </a:extLst>
+            </p:cNvPr>
+            <p:cNvSpPr/>
+            <p:nvPr/>
+          </p:nvSpPr>
+          <p:spPr>
+            <a:xfrm>
+              <a:off x="3396000" y="729000"/>
+              <a:ext cx="5400000" cy="5400000"/>
+            </a:xfrm>
+            <a:prstGeom prst="rect">
+              <a:avLst/>
+            </a:prstGeom>
+            <a:solidFill>
+              <a:schemeClr val="bg1"/>
+            </a:solidFill>
+            <a:ln w="101600"/>
+          </p:spPr>
+          <p:style>
+            <a:lnRef idx="2">
+              <a:schemeClr val="accent1">
+                <a:shade val="15000"/>
+              </a:schemeClr>
+            </a:lnRef>
+            <a:fillRef idx="1">
+              <a:schemeClr val="accent1"/>
+            </a:fillRef>
+            <a:effectRef idx="0">
+              <a:schemeClr val="accent1"/>
+            </a:effectRef>
+            <a:fontRef idx="minor">
+              <a:schemeClr val="lt1"/>
+            </a:fontRef>
+          </p:style>
+          <p:txBody>
+            <a:bodyPr rtlCol="0" anchor="ctr"/>
+            <a:lstStyle/>
+            <a:p>
+              <a:pPr algn="ctr"/>
+              <a:endParaRPr lang="ja-JP" altLang="en-US" sz="12000" b="1" dirty="0">
                 <a:solidFill>
                   <a:schemeClr val="tx1"/>
                 </a:solidFill>
                 <a:latin typeface="EPSON Pゴシック W7" panose="02000600000000000000" pitchFamily="2" charset="-128"/>
                 <a:ea typeface="EPSON Pゴシック W7" panose="02000600000000000000" pitchFamily="2" charset="-128"/>
-              </a:rPr>
-              <a:t>[]()</a:t>
-            </a:r>
-          </a:p>
-          <a:p>
-            <a:r>
-              <a:rPr lang="en-US" altLang="ja-JP" sz="16000" b="1" dirty="0">
-                <a:latin typeface="EPSON Pゴシック W7" panose="02000600000000000000" pitchFamily="2" charset="-128"/>
-                <a:ea typeface="EPSON Pゴシック W7" panose="02000600000000000000" pitchFamily="2" charset="-128"/>
-              </a:rPr>
-              <a:t>[]()</a:t>
-            </a:r>
-          </a:p>
-        </p:txBody>
-      </p:sp>
+              </a:endParaRPr>
+            </a:p>
+          </p:txBody>
+        </p:sp>
+        <p:sp>
+          <p:nvSpPr>
+            <p:cNvPr id="2" name="TextBox 1">
+              <a:extLst>
+                <a:ext uri="{FF2B5EF4-FFF2-40B4-BE49-F238E27FC236}">
+                  <a16:creationId xmlns:a16="http://schemas.microsoft.com/office/drawing/2014/main" id="{CFEAD816-A709-7F67-4D02-76FCC7515A24}"/>
+                </a:ext>
+              </a:extLst>
+            </p:cNvPr>
+            <p:cNvSpPr txBox="1"/>
+            <p:nvPr/>
+          </p:nvSpPr>
+          <p:spPr>
+            <a:xfrm>
+              <a:off x="4005942" y="829181"/>
+              <a:ext cx="4180115" cy="5016758"/>
+            </a:xfrm>
+            <a:prstGeom prst="rect">
+              <a:avLst/>
+            </a:prstGeom>
+            <a:noFill/>
+          </p:spPr>
+          <p:txBody>
+            <a:bodyPr wrap="square" rtlCol="0">
+              <a:spAutoFit/>
+            </a:bodyPr>
+            <a:lstStyle/>
+            <a:p>
+              <a:r>
+                <a:rPr lang="en-US" altLang="ja-JP" sz="16000" b="1" dirty="0">
+                  <a:solidFill>
+                    <a:schemeClr val="tx1"/>
+                  </a:solidFill>
+                  <a:latin typeface="EPSON Pゴシック W7" panose="02000600000000000000" pitchFamily="2" charset="-128"/>
+                  <a:ea typeface="EPSON Pゴシック W7" panose="02000600000000000000" pitchFamily="2" charset="-128"/>
+                </a:rPr>
+                <a:t>[]()</a:t>
+              </a:r>
+            </a:p>
+            <a:p>
+              <a:r>
+                <a:rPr lang="en-US" altLang="ja-JP" sz="16000" b="1" dirty="0">
+                  <a:latin typeface="EPSON Pゴシック W7" panose="02000600000000000000" pitchFamily="2" charset="-128"/>
+                  <a:ea typeface="EPSON Pゴシック W7" panose="02000600000000000000" pitchFamily="2" charset="-128"/>
+                </a:rPr>
+                <a:t>[]()</a:t>
+              </a:r>
+            </a:p>
+          </p:txBody>
+        </p:sp>
+      </p:grpSp>
     </p:spTree>
     <p:extLst>
       <p:ext uri="{BB962C8B-B14F-4D97-AF65-F5344CB8AC3E}">
         <p14:creationId xmlns:p14="http://schemas.microsoft.com/office/powerpoint/2010/main" val="3366662516"/>
+      </p:ext>
+    </p:extLst>
+  </p:cSld>
+  <p:clrMapOvr>
+    <a:masterClrMapping/>
+  </p:clrMapOvr>
+</p:sld>
+</file>
+
+<file path=ppt/slides/slide6.xml><?xml version="1.0" encoding="utf-8"?>
+<p:sld xmlns:a="http://schemas.openxmlformats.org/drawingml/2006/main" xmlns:r="http://schemas.openxmlformats.org/officeDocument/2006/relationships" xmlns:p="http://schemas.openxmlformats.org/presentationml/2006/main">
+  <p:cSld>
+    <p:spTree>
+      <p:nvGrpSpPr>
+        <p:cNvPr id="1" name="">
+          <a:extLst>
+            <a:ext uri="{FF2B5EF4-FFF2-40B4-BE49-F238E27FC236}">
+              <a16:creationId xmlns:a16="http://schemas.microsoft.com/office/drawing/2014/main" id="{15F2B5E1-1769-219D-4153-E510275B0016}"/>
+            </a:ext>
+          </a:extLst>
+        </p:cNvPr>
+        <p:cNvGrpSpPr/>
+        <p:nvPr/>
+      </p:nvGrpSpPr>
+      <p:grpSpPr>
+        <a:xfrm>
+          <a:off x="0" y="0"/>
+          <a:ext cx="0" cy="0"/>
+          <a:chOff x="0" y="0"/>
+          <a:chExt cx="0" cy="0"/>
+        </a:xfrm>
+      </p:grpSpPr>
+      <p:grpSp>
+        <p:nvGrpSpPr>
+          <p:cNvPr id="3" name="Group 2">
+            <a:extLst>
+              <a:ext uri="{FF2B5EF4-FFF2-40B4-BE49-F238E27FC236}">
+                <a16:creationId xmlns:a16="http://schemas.microsoft.com/office/drawing/2014/main" id="{3C54FE7E-CCCE-4658-4448-63043A2AE677}"/>
+              </a:ext>
+            </a:extLst>
+          </p:cNvPr>
+          <p:cNvGrpSpPr/>
+          <p:nvPr/>
+        </p:nvGrpSpPr>
+        <p:grpSpPr>
+          <a:xfrm>
+            <a:off x="3396000" y="729000"/>
+            <a:ext cx="5400000" cy="5400000"/>
+            <a:chOff x="3396000" y="729000"/>
+            <a:chExt cx="5400000" cy="5400000"/>
+          </a:xfrm>
+        </p:grpSpPr>
+        <p:sp>
+          <p:nvSpPr>
+            <p:cNvPr id="4" name="Rectangle 3">
+              <a:extLst>
+                <a:ext uri="{FF2B5EF4-FFF2-40B4-BE49-F238E27FC236}">
+                  <a16:creationId xmlns:a16="http://schemas.microsoft.com/office/drawing/2014/main" id="{7AD2390C-39AC-DF0E-6A9E-DF36552B8CDB}"/>
+                </a:ext>
+              </a:extLst>
+            </p:cNvPr>
+            <p:cNvSpPr/>
+            <p:nvPr/>
+          </p:nvSpPr>
+          <p:spPr>
+            <a:xfrm>
+              <a:off x="3396000" y="729000"/>
+              <a:ext cx="5400000" cy="5400000"/>
+            </a:xfrm>
+            <a:prstGeom prst="rect">
+              <a:avLst/>
+            </a:prstGeom>
+            <a:noFill/>
+            <a:ln w="101600">
+              <a:noFill/>
+            </a:ln>
+          </p:spPr>
+          <p:style>
+            <a:lnRef idx="2">
+              <a:schemeClr val="accent1">
+                <a:shade val="15000"/>
+              </a:schemeClr>
+            </a:lnRef>
+            <a:fillRef idx="1">
+              <a:schemeClr val="accent1"/>
+            </a:fillRef>
+            <a:effectRef idx="0">
+              <a:schemeClr val="accent1"/>
+            </a:effectRef>
+            <a:fontRef idx="minor">
+              <a:schemeClr val="lt1"/>
+            </a:fontRef>
+          </p:style>
+          <p:txBody>
+            <a:bodyPr rtlCol="0" anchor="ctr"/>
+            <a:lstStyle/>
+            <a:p>
+              <a:pPr algn="ctr"/>
+              <a:endParaRPr lang="ja-JP" altLang="en-US" sz="12000" b="1" dirty="0">
+                <a:solidFill>
+                  <a:schemeClr val="tx1"/>
+                </a:solidFill>
+                <a:latin typeface="EPSON Pゴシック W7" panose="02000600000000000000" pitchFamily="2" charset="-128"/>
+                <a:ea typeface="EPSON Pゴシック W7" panose="02000600000000000000" pitchFamily="2" charset="-128"/>
+              </a:endParaRPr>
+            </a:p>
+          </p:txBody>
+        </p:sp>
+        <p:sp>
+          <p:nvSpPr>
+            <p:cNvPr id="2" name="TextBox 1">
+              <a:extLst>
+                <a:ext uri="{FF2B5EF4-FFF2-40B4-BE49-F238E27FC236}">
+                  <a16:creationId xmlns:a16="http://schemas.microsoft.com/office/drawing/2014/main" id="{08841449-267A-2C3D-D067-4FCBD875CFF4}"/>
+                </a:ext>
+              </a:extLst>
+            </p:cNvPr>
+            <p:cNvSpPr txBox="1"/>
+            <p:nvPr/>
+          </p:nvSpPr>
+          <p:spPr>
+            <a:xfrm>
+              <a:off x="4005942" y="829181"/>
+              <a:ext cx="4180115" cy="5016758"/>
+            </a:xfrm>
+            <a:prstGeom prst="rect">
+              <a:avLst/>
+            </a:prstGeom>
+            <a:noFill/>
+          </p:spPr>
+          <p:txBody>
+            <a:bodyPr wrap="square" rtlCol="0">
+              <a:spAutoFit/>
+            </a:bodyPr>
+            <a:lstStyle/>
+            <a:p>
+              <a:r>
+                <a:rPr lang="en-US" altLang="ja-JP" sz="16000" b="1" dirty="0">
+                  <a:solidFill>
+                    <a:schemeClr val="tx1"/>
+                  </a:solidFill>
+                  <a:latin typeface="EPSON Pゴシック W7" panose="02000600000000000000" pitchFamily="2" charset="-128"/>
+                  <a:ea typeface="EPSON Pゴシック W7" panose="02000600000000000000" pitchFamily="2" charset="-128"/>
+                </a:rPr>
+                <a:t>[]()</a:t>
+              </a:r>
+            </a:p>
+            <a:p>
+              <a:r>
+                <a:rPr lang="en-US" altLang="ja-JP" sz="16000" b="1" dirty="0">
+                  <a:latin typeface="EPSON Pゴシック W7" panose="02000600000000000000" pitchFamily="2" charset="-128"/>
+                  <a:ea typeface="EPSON Pゴシック W7" panose="02000600000000000000" pitchFamily="2" charset="-128"/>
+                </a:rPr>
+                <a:t>[]()</a:t>
+              </a:r>
+            </a:p>
+          </p:txBody>
+        </p:sp>
+      </p:grpSp>
+    </p:spTree>
+    <p:extLst>
+      <p:ext uri="{BB962C8B-B14F-4D97-AF65-F5344CB8AC3E}">
+        <p14:creationId xmlns:p14="http://schemas.microsoft.com/office/powerpoint/2010/main" val="679660570"/>
       </p:ext>
     </p:extLst>
   </p:cSld>
